--- a/Documentation/communication.pptx
+++ b/Documentation/communication.pptx
@@ -259,7 +259,7 @@
           <a:p>
             <a:fld id="{A5BA47D6-54C3-4E05-8E1B-3F136E8C88C6}" type="datetimeFigureOut">
               <a:rPr lang="en-US" smtClean="0"/>
-              <a:t>4/24/2023</a:t>
+              <a:t>4/25/2023</a:t>
             </a:fld>
             <a:endParaRPr lang="en-US"/>
           </a:p>
@@ -457,7 +457,7 @@
           <a:p>
             <a:fld id="{A5BA47D6-54C3-4E05-8E1B-3F136E8C88C6}" type="datetimeFigureOut">
               <a:rPr lang="en-US" smtClean="0"/>
-              <a:t>4/24/2023</a:t>
+              <a:t>4/25/2023</a:t>
             </a:fld>
             <a:endParaRPr lang="en-US"/>
           </a:p>
@@ -665,7 +665,7 @@
           <a:p>
             <a:fld id="{A5BA47D6-54C3-4E05-8E1B-3F136E8C88C6}" type="datetimeFigureOut">
               <a:rPr lang="en-US" smtClean="0"/>
-              <a:t>4/24/2023</a:t>
+              <a:t>4/25/2023</a:t>
             </a:fld>
             <a:endParaRPr lang="en-US"/>
           </a:p>
@@ -863,7 +863,7 @@
           <a:p>
             <a:fld id="{A5BA47D6-54C3-4E05-8E1B-3F136E8C88C6}" type="datetimeFigureOut">
               <a:rPr lang="en-US" smtClean="0"/>
-              <a:t>4/24/2023</a:t>
+              <a:t>4/25/2023</a:t>
             </a:fld>
             <a:endParaRPr lang="en-US"/>
           </a:p>
@@ -1138,7 +1138,7 @@
           <a:p>
             <a:fld id="{A5BA47D6-54C3-4E05-8E1B-3F136E8C88C6}" type="datetimeFigureOut">
               <a:rPr lang="en-US" smtClean="0"/>
-              <a:t>4/24/2023</a:t>
+              <a:t>4/25/2023</a:t>
             </a:fld>
             <a:endParaRPr lang="en-US"/>
           </a:p>
@@ -1403,7 +1403,7 @@
           <a:p>
             <a:fld id="{A5BA47D6-54C3-4E05-8E1B-3F136E8C88C6}" type="datetimeFigureOut">
               <a:rPr lang="en-US" smtClean="0"/>
-              <a:t>4/24/2023</a:t>
+              <a:t>4/25/2023</a:t>
             </a:fld>
             <a:endParaRPr lang="en-US"/>
           </a:p>
@@ -1815,7 +1815,7 @@
           <a:p>
             <a:fld id="{A5BA47D6-54C3-4E05-8E1B-3F136E8C88C6}" type="datetimeFigureOut">
               <a:rPr lang="en-US" smtClean="0"/>
-              <a:t>4/24/2023</a:t>
+              <a:t>4/25/2023</a:t>
             </a:fld>
             <a:endParaRPr lang="en-US"/>
           </a:p>
@@ -1956,7 +1956,7 @@
           <a:p>
             <a:fld id="{A5BA47D6-54C3-4E05-8E1B-3F136E8C88C6}" type="datetimeFigureOut">
               <a:rPr lang="en-US" smtClean="0"/>
-              <a:t>4/24/2023</a:t>
+              <a:t>4/25/2023</a:t>
             </a:fld>
             <a:endParaRPr lang="en-US"/>
           </a:p>
@@ -2069,7 +2069,7 @@
           <a:p>
             <a:fld id="{A5BA47D6-54C3-4E05-8E1B-3F136E8C88C6}" type="datetimeFigureOut">
               <a:rPr lang="en-US" smtClean="0"/>
-              <a:t>4/24/2023</a:t>
+              <a:t>4/25/2023</a:t>
             </a:fld>
             <a:endParaRPr lang="en-US"/>
           </a:p>
@@ -2380,7 +2380,7 @@
           <a:p>
             <a:fld id="{A5BA47D6-54C3-4E05-8E1B-3F136E8C88C6}" type="datetimeFigureOut">
               <a:rPr lang="en-US" smtClean="0"/>
-              <a:t>4/24/2023</a:t>
+              <a:t>4/25/2023</a:t>
             </a:fld>
             <a:endParaRPr lang="en-US"/>
           </a:p>
@@ -2668,7 +2668,7 @@
           <a:p>
             <a:fld id="{A5BA47D6-54C3-4E05-8E1B-3F136E8C88C6}" type="datetimeFigureOut">
               <a:rPr lang="en-US" smtClean="0"/>
-              <a:t>4/24/2023</a:t>
+              <a:t>4/25/2023</a:t>
             </a:fld>
             <a:endParaRPr lang="en-US"/>
           </a:p>
@@ -2909,7 +2909,7 @@
           <a:p>
             <a:fld id="{A5BA47D6-54C3-4E05-8E1B-3F136E8C88C6}" type="datetimeFigureOut">
               <a:rPr lang="en-US" smtClean="0"/>
-              <a:t>4/24/2023</a:t>
+              <a:t>4/25/2023</a:t>
             </a:fld>
             <a:endParaRPr lang="en-US"/>
           </a:p>
@@ -3341,9 +3341,9 @@
         <p:grpSpPr>
           <a:xfrm>
             <a:off x="838365" y="1019513"/>
-            <a:ext cx="10892424" cy="4818974"/>
+            <a:ext cx="10945275" cy="4818974"/>
             <a:chOff x="308058" y="1043491"/>
-            <a:chExt cx="8962393" cy="3616491"/>
+            <a:chExt cx="9005879" cy="3616491"/>
           </a:xfrm>
         </p:grpSpPr>
         <p:sp>
@@ -5292,8 +5292,8 @@
           </p:nvSpPr>
           <p:spPr>
             <a:xfrm>
-              <a:off x="7374659" y="4382810"/>
-              <a:ext cx="1895792" cy="277172"/>
+              <a:off x="7170518" y="4380603"/>
+              <a:ext cx="2143419" cy="277172"/>
             </a:xfrm>
             <a:prstGeom prst="rect">
               <a:avLst/>
@@ -5308,7 +5308,7 @@
             <a:p>
               <a:r>
                 <a:rPr lang="en-US" dirty="0"/>
-                <a:t>Redis Key-Value Stores</a:t>
+                <a:t>Non-Relational Databases</a:t>
               </a:r>
             </a:p>
           </p:txBody>
@@ -5487,7 +5487,7 @@
           </p:nvSpPr>
           <p:spPr>
             <a:xfrm>
-              <a:off x="4004951" y="1905874"/>
+              <a:off x="4086409" y="1849472"/>
               <a:ext cx="1421899" cy="346465"/>
             </a:xfrm>
             <a:prstGeom prst="rect">
@@ -5646,86 +5646,6 @@
             </a:p>
           </p:txBody>
         </p:sp>
-        <p:cxnSp>
-          <p:nvCxnSpPr>
-            <p:cNvPr id="54" name="Straight Arrow Connector 53">
-              <a:extLst>
-                <a:ext uri="{FF2B5EF4-FFF2-40B4-BE49-F238E27FC236}">
-                  <a16:creationId xmlns:a16="http://schemas.microsoft.com/office/drawing/2014/main" id="{94E441C2-D4D0-7019-B3DF-86ABB0A29905}"/>
-                </a:ext>
-              </a:extLst>
-            </p:cNvPr>
-            <p:cNvCxnSpPr>
-              <a:cxnSpLocks/>
-              <a:stCxn id="39" idx="3"/>
-              <a:endCxn id="47" idx="1"/>
-            </p:cNvCxnSpPr>
-            <p:nvPr/>
-          </p:nvCxnSpPr>
-          <p:spPr>
-            <a:xfrm flipV="1">
-              <a:off x="3716339" y="3008971"/>
-              <a:ext cx="1399112" cy="6606"/>
-            </a:xfrm>
-            <a:prstGeom prst="straightConnector1">
-              <a:avLst/>
-            </a:prstGeom>
-            <a:ln w="19050">
-              <a:headEnd type="triangle"/>
-              <a:tailEnd type="triangle"/>
-            </a:ln>
-          </p:spPr>
-          <p:style>
-            <a:lnRef idx="1">
-              <a:schemeClr val="dk1"/>
-            </a:lnRef>
-            <a:fillRef idx="0">
-              <a:schemeClr val="dk1"/>
-            </a:fillRef>
-            <a:effectRef idx="0">
-              <a:schemeClr val="dk1"/>
-            </a:effectRef>
-            <a:fontRef idx="minor">
-              <a:schemeClr val="tx1"/>
-            </a:fontRef>
-          </p:style>
-        </p:cxnSp>
-        <p:sp>
-          <p:nvSpPr>
-            <p:cNvPr id="55" name="TextBox 54">
-              <a:extLst>
-                <a:ext uri="{FF2B5EF4-FFF2-40B4-BE49-F238E27FC236}">
-                  <a16:creationId xmlns:a16="http://schemas.microsoft.com/office/drawing/2014/main" id="{E7D2D960-B020-E720-0B0B-4F9E513A3EC2}"/>
-                </a:ext>
-              </a:extLst>
-            </p:cNvPr>
-            <p:cNvSpPr txBox="1"/>
-            <p:nvPr/>
-          </p:nvSpPr>
-          <p:spPr>
-            <a:xfrm>
-              <a:off x="3865580" y="3015577"/>
-              <a:ext cx="1101601" cy="254074"/>
-            </a:xfrm>
-            <a:prstGeom prst="rect">
-              <a:avLst/>
-            </a:prstGeom>
-            <a:noFill/>
-          </p:spPr>
-          <p:txBody>
-            <a:bodyPr wrap="none" rtlCol="0">
-              <a:spAutoFit/>
-            </a:bodyPr>
-            <a:lstStyle/>
-            <a:p>
-              <a:pPr algn="ctr"/>
-              <a:r>
-                <a:rPr lang="en-US" sz="1600" dirty="0"/>
-                <a:t>Function Calls</a:t>
-              </a:r>
-            </a:p>
-          </p:txBody>
-        </p:sp>
         <p:sp>
           <p:nvSpPr>
             <p:cNvPr id="47" name="Rectangle: Rounded Corners 46">
@@ -5740,8 +5660,8 @@
           </p:nvSpPr>
           <p:spPr>
             <a:xfrm>
-              <a:off x="5115450" y="2698174"/>
-              <a:ext cx="1754760" cy="621594"/>
+              <a:off x="5125134" y="2661821"/>
+              <a:ext cx="1732560" cy="621594"/>
             </a:xfrm>
             <a:prstGeom prst="roundRect">
               <a:avLst/>
@@ -5773,14 +5693,7 @@
               <a:pPr algn="ctr"/>
               <a:r>
                 <a:rPr lang="en-US" dirty="0"/>
-                <a:t>redis-py</a:t>
-              </a:r>
-            </a:p>
-            <a:p>
-              <a:pPr algn="ctr"/>
-              <a:r>
-                <a:rPr lang="en-US" dirty="0"/>
-                <a:t>(Python Interface)</a:t>
+                <a:t>Database Communication Interface</a:t>
               </a:r>
             </a:p>
           </p:txBody>
@@ -5928,6 +5841,220 @@
           </p:txBody>
         </p:sp>
       </p:grpSp>
+      <p:sp>
+        <p:nvSpPr>
+          <p:cNvPr id="2" name="TextBox 1">
+            <a:extLst>
+              <a:ext uri="{FF2B5EF4-FFF2-40B4-BE49-F238E27FC236}">
+                <a16:creationId xmlns:a16="http://schemas.microsoft.com/office/drawing/2014/main" id="{25AF4ED3-19D4-17A8-8BD3-4D289506819A}"/>
+              </a:ext>
+            </a:extLst>
+          </p:cNvPr>
+          <p:cNvSpPr txBox="1"/>
+          <p:nvPr/>
+        </p:nvSpPr>
+        <p:spPr>
+          <a:xfrm rot="18747171">
+            <a:off x="8939288" y="2115408"/>
+            <a:ext cx="860044" cy="338554"/>
+          </a:xfrm>
+          <a:prstGeom prst="rect">
+            <a:avLst/>
+          </a:prstGeom>
+          <a:noFill/>
+        </p:spPr>
+        <p:txBody>
+          <a:bodyPr wrap="none" rtlCol="0">
+            <a:spAutoFit/>
+          </a:bodyPr>
+          <a:lstStyle/>
+          <a:p>
+            <a:r>
+              <a:rPr lang="en-US" sz="1600" dirty="0"/>
+              <a:t>Request</a:t>
+            </a:r>
+          </a:p>
+        </p:txBody>
+      </p:sp>
+      <p:sp>
+        <p:nvSpPr>
+          <p:cNvPr id="3" name="TextBox 2">
+            <a:extLst>
+              <a:ext uri="{FF2B5EF4-FFF2-40B4-BE49-F238E27FC236}">
+                <a16:creationId xmlns:a16="http://schemas.microsoft.com/office/drawing/2014/main" id="{D842A4A2-B9F9-AFB8-5008-25A985BADD3C}"/>
+              </a:ext>
+            </a:extLst>
+          </p:cNvPr>
+          <p:cNvSpPr txBox="1"/>
+          <p:nvPr/>
+        </p:nvSpPr>
+        <p:spPr>
+          <a:xfrm rot="1007641">
+            <a:off x="9153746" y="3716556"/>
+            <a:ext cx="982577" cy="338554"/>
+          </a:xfrm>
+          <a:prstGeom prst="rect">
+            <a:avLst/>
+          </a:prstGeom>
+          <a:noFill/>
+        </p:spPr>
+        <p:txBody>
+          <a:bodyPr wrap="none" rtlCol="0">
+            <a:spAutoFit/>
+          </a:bodyPr>
+          <a:lstStyle/>
+          <a:p>
+            <a:r>
+              <a:rPr lang="en-US" sz="1600" dirty="0"/>
+              <a:t>Response</a:t>
+            </a:r>
+          </a:p>
+        </p:txBody>
+      </p:sp>
+      <p:sp>
+        <p:nvSpPr>
+          <p:cNvPr id="4" name="Rectangle 3">
+            <a:extLst>
+              <a:ext uri="{FF2B5EF4-FFF2-40B4-BE49-F238E27FC236}">
+                <a16:creationId xmlns:a16="http://schemas.microsoft.com/office/drawing/2014/main" id="{4C0FDA8F-0E38-1627-2DAE-6CD7F36C4EF5}"/>
+              </a:ext>
+            </a:extLst>
+          </p:cNvPr>
+          <p:cNvSpPr/>
+          <p:nvPr/>
+        </p:nvSpPr>
+        <p:spPr>
+          <a:xfrm>
+            <a:off x="5277230" y="2696902"/>
+            <a:ext cx="1107168" cy="1780674"/>
+          </a:xfrm>
+          <a:prstGeom prst="rect">
+            <a:avLst/>
+          </a:prstGeom>
+        </p:spPr>
+        <p:style>
+          <a:lnRef idx="2">
+            <a:schemeClr val="dk1"/>
+          </a:lnRef>
+          <a:fillRef idx="1">
+            <a:schemeClr val="lt1"/>
+          </a:fillRef>
+          <a:effectRef idx="0">
+            <a:schemeClr val="dk1"/>
+          </a:effectRef>
+          <a:fontRef idx="minor">
+            <a:schemeClr val="dk1"/>
+          </a:fontRef>
+        </p:style>
+        <p:txBody>
+          <a:bodyPr rtlCol="0" anchor="ctr"/>
+          <a:lstStyle/>
+          <a:p>
+            <a:pPr algn="ctr"/>
+            <a:r>
+              <a:rPr lang="en-US" dirty="0"/>
+              <a:t>Internal Modules</a:t>
+            </a:r>
+          </a:p>
+        </p:txBody>
+      </p:sp>
+      <p:cxnSp>
+        <p:nvCxnSpPr>
+          <p:cNvPr id="6" name="Straight Arrow Connector 5">
+            <a:extLst>
+              <a:ext uri="{FF2B5EF4-FFF2-40B4-BE49-F238E27FC236}">
+                <a16:creationId xmlns:a16="http://schemas.microsoft.com/office/drawing/2014/main" id="{6716D69B-8FB2-5A98-9A20-E8B8ADCD7592}"/>
+              </a:ext>
+            </a:extLst>
+          </p:cNvPr>
+          <p:cNvCxnSpPr>
+            <a:cxnSpLocks/>
+            <a:endCxn id="4" idx="1"/>
+          </p:cNvCxnSpPr>
+          <p:nvPr/>
+        </p:nvCxnSpPr>
+        <p:spPr>
+          <a:xfrm>
+            <a:off x="4991682" y="3581826"/>
+            <a:ext cx="285548" cy="5413"/>
+          </a:xfrm>
+          <a:prstGeom prst="straightConnector1">
+            <a:avLst/>
+          </a:prstGeom>
+          <a:ln w="9525" cap="flat" cmpd="sng" algn="ctr">
+            <a:solidFill>
+              <a:schemeClr val="dk1"/>
+            </a:solidFill>
+            <a:prstDash val="solid"/>
+            <a:round/>
+            <a:headEnd type="arrow" w="med" len="med"/>
+            <a:tailEnd type="arrow" w="med" len="med"/>
+          </a:ln>
+        </p:spPr>
+        <p:style>
+          <a:lnRef idx="0">
+            <a:scrgbClr r="0" g="0" b="0"/>
+          </a:lnRef>
+          <a:fillRef idx="0">
+            <a:scrgbClr r="0" g="0" b="0"/>
+          </a:fillRef>
+          <a:effectRef idx="0">
+            <a:scrgbClr r="0" g="0" b="0"/>
+          </a:effectRef>
+          <a:fontRef idx="minor">
+            <a:schemeClr val="tx1"/>
+          </a:fontRef>
+        </p:style>
+      </p:cxnSp>
+      <p:cxnSp>
+        <p:nvCxnSpPr>
+          <p:cNvPr id="8" name="Straight Arrow Connector 7">
+            <a:extLst>
+              <a:ext uri="{FF2B5EF4-FFF2-40B4-BE49-F238E27FC236}">
+                <a16:creationId xmlns:a16="http://schemas.microsoft.com/office/drawing/2014/main" id="{F12757EC-043B-6909-BA7D-CFF90A8E05D2}"/>
+              </a:ext>
+            </a:extLst>
+          </p:cNvPr>
+          <p:cNvCxnSpPr>
+            <a:cxnSpLocks/>
+            <a:stCxn id="4" idx="3"/>
+            <a:endCxn id="47" idx="1"/>
+          </p:cNvCxnSpPr>
+          <p:nvPr/>
+        </p:nvCxnSpPr>
+        <p:spPr>
+          <a:xfrm>
+            <a:off x="6384398" y="3587239"/>
+            <a:ext cx="308390" cy="2836"/>
+          </a:xfrm>
+          <a:prstGeom prst="straightConnector1">
+            <a:avLst/>
+          </a:prstGeom>
+          <a:ln w="9525" cap="flat" cmpd="sng" algn="ctr">
+            <a:solidFill>
+              <a:schemeClr val="dk1"/>
+            </a:solidFill>
+            <a:prstDash val="solid"/>
+            <a:round/>
+            <a:headEnd type="arrow" w="med" len="med"/>
+            <a:tailEnd type="arrow" w="med" len="med"/>
+          </a:ln>
+        </p:spPr>
+        <p:style>
+          <a:lnRef idx="0">
+            <a:scrgbClr r="0" g="0" b="0"/>
+          </a:lnRef>
+          <a:fillRef idx="0">
+            <a:scrgbClr r="0" g="0" b="0"/>
+          </a:fillRef>
+          <a:effectRef idx="0">
+            <a:scrgbClr r="0" g="0" b="0"/>
+          </a:effectRef>
+          <a:fontRef idx="minor">
+            <a:schemeClr val="tx1"/>
+          </a:fontRef>
+        </p:style>
+      </p:cxnSp>
     </p:spTree>
     <p:extLst>
       <p:ext uri="{BB962C8B-B14F-4D97-AF65-F5344CB8AC3E}">

--- a/Documentation/communication.pptx
+++ b/Documentation/communication.pptx
@@ -259,7 +259,7 @@
           <a:p>
             <a:fld id="{A5BA47D6-54C3-4E05-8E1B-3F136E8C88C6}" type="datetimeFigureOut">
               <a:rPr lang="en-US" smtClean="0"/>
-              <a:t>4/25/2023</a:t>
+              <a:t>4/28/2023</a:t>
             </a:fld>
             <a:endParaRPr lang="en-US"/>
           </a:p>
@@ -457,7 +457,7 @@
           <a:p>
             <a:fld id="{A5BA47D6-54C3-4E05-8E1B-3F136E8C88C6}" type="datetimeFigureOut">
               <a:rPr lang="en-US" smtClean="0"/>
-              <a:t>4/25/2023</a:t>
+              <a:t>4/28/2023</a:t>
             </a:fld>
             <a:endParaRPr lang="en-US"/>
           </a:p>
@@ -665,7 +665,7 @@
           <a:p>
             <a:fld id="{A5BA47D6-54C3-4E05-8E1B-3F136E8C88C6}" type="datetimeFigureOut">
               <a:rPr lang="en-US" smtClean="0"/>
-              <a:t>4/25/2023</a:t>
+              <a:t>4/28/2023</a:t>
             </a:fld>
             <a:endParaRPr lang="en-US"/>
           </a:p>
@@ -863,7 +863,7 @@
           <a:p>
             <a:fld id="{A5BA47D6-54C3-4E05-8E1B-3F136E8C88C6}" type="datetimeFigureOut">
               <a:rPr lang="en-US" smtClean="0"/>
-              <a:t>4/25/2023</a:t>
+              <a:t>4/28/2023</a:t>
             </a:fld>
             <a:endParaRPr lang="en-US"/>
           </a:p>
@@ -1138,7 +1138,7 @@
           <a:p>
             <a:fld id="{A5BA47D6-54C3-4E05-8E1B-3F136E8C88C6}" type="datetimeFigureOut">
               <a:rPr lang="en-US" smtClean="0"/>
-              <a:t>4/25/2023</a:t>
+              <a:t>4/28/2023</a:t>
             </a:fld>
             <a:endParaRPr lang="en-US"/>
           </a:p>
@@ -1403,7 +1403,7 @@
           <a:p>
             <a:fld id="{A5BA47D6-54C3-4E05-8E1B-3F136E8C88C6}" type="datetimeFigureOut">
               <a:rPr lang="en-US" smtClean="0"/>
-              <a:t>4/25/2023</a:t>
+              <a:t>4/28/2023</a:t>
             </a:fld>
             <a:endParaRPr lang="en-US"/>
           </a:p>
@@ -1815,7 +1815,7 @@
           <a:p>
             <a:fld id="{A5BA47D6-54C3-4E05-8E1B-3F136E8C88C6}" type="datetimeFigureOut">
               <a:rPr lang="en-US" smtClean="0"/>
-              <a:t>4/25/2023</a:t>
+              <a:t>4/28/2023</a:t>
             </a:fld>
             <a:endParaRPr lang="en-US"/>
           </a:p>
@@ -1956,7 +1956,7 @@
           <a:p>
             <a:fld id="{A5BA47D6-54C3-4E05-8E1B-3F136E8C88C6}" type="datetimeFigureOut">
               <a:rPr lang="en-US" smtClean="0"/>
-              <a:t>4/25/2023</a:t>
+              <a:t>4/28/2023</a:t>
             </a:fld>
             <a:endParaRPr lang="en-US"/>
           </a:p>
@@ -2069,7 +2069,7 @@
           <a:p>
             <a:fld id="{A5BA47D6-54C3-4E05-8E1B-3F136E8C88C6}" type="datetimeFigureOut">
               <a:rPr lang="en-US" smtClean="0"/>
-              <a:t>4/25/2023</a:t>
+              <a:t>4/28/2023</a:t>
             </a:fld>
             <a:endParaRPr lang="en-US"/>
           </a:p>
@@ -2380,7 +2380,7 @@
           <a:p>
             <a:fld id="{A5BA47D6-54C3-4E05-8E1B-3F136E8C88C6}" type="datetimeFigureOut">
               <a:rPr lang="en-US" smtClean="0"/>
-              <a:t>4/25/2023</a:t>
+              <a:t>4/28/2023</a:t>
             </a:fld>
             <a:endParaRPr lang="en-US"/>
           </a:p>
@@ -2668,7 +2668,7 @@
           <a:p>
             <a:fld id="{A5BA47D6-54C3-4E05-8E1B-3F136E8C88C6}" type="datetimeFigureOut">
               <a:rPr lang="en-US" smtClean="0"/>
-              <a:t>4/25/2023</a:t>
+              <a:t>4/28/2023</a:t>
             </a:fld>
             <a:endParaRPr lang="en-US"/>
           </a:p>
@@ -2909,7 +2909,7 @@
           <a:p>
             <a:fld id="{A5BA47D6-54C3-4E05-8E1B-3F136E8C88C6}" type="datetimeFigureOut">
               <a:rPr lang="en-US" smtClean="0"/>
-              <a:t>4/25/2023</a:t>
+              <a:t>4/28/2023</a:t>
             </a:fld>
             <a:endParaRPr lang="en-US"/>
           </a:p>
@@ -5292,8 +5292,8 @@
           </p:nvSpPr>
           <p:spPr>
             <a:xfrm>
-              <a:off x="7170518" y="4380603"/>
-              <a:ext cx="2143419" cy="277172"/>
+              <a:off x="7373138" y="4380603"/>
+              <a:ext cx="1940799" cy="277172"/>
             </a:xfrm>
             <a:prstGeom prst="rect">
               <a:avLst/>
@@ -5308,7 +5308,7 @@
             <a:p>
               <a:r>
                 <a:rPr lang="en-US" dirty="0"/>
-                <a:t>Non-Relational Databases</a:t>
+                <a:t>Redis Databases Nodes</a:t>
               </a:r>
             </a:p>
           </p:txBody>
@@ -5660,8 +5660,8 @@
           </p:nvSpPr>
           <p:spPr>
             <a:xfrm>
-              <a:off x="5125134" y="2661821"/>
-              <a:ext cx="1732560" cy="621594"/>
+              <a:off x="5048667" y="2573411"/>
+              <a:ext cx="1809028" cy="798334"/>
             </a:xfrm>
             <a:prstGeom prst="roundRect">
               <a:avLst/>
@@ -5689,6 +5689,17 @@
           <p:txBody>
             <a:bodyPr rtlCol="0" anchor="ctr"/>
             <a:lstStyle/>
+            <a:p>
+              <a:pPr algn="ctr"/>
+              <a:r>
+                <a:rPr lang="en-US" dirty="0" err="1"/>
+                <a:t>redis-py</a:t>
+              </a:r>
+              <a:r>
+                <a:rPr lang="en-US" dirty="0"/>
+                <a:t> </a:t>
+              </a:r>
+            </a:p>
             <a:p>
               <a:pPr algn="ctr"/>
               <a:r>
@@ -5864,7 +5875,7 @@
           <a:noFill/>
         </p:spPr>
         <p:txBody>
-          <a:bodyPr wrap="none" rtlCol="0">
+          <a:bodyPr wrap="square" rtlCol="0">
             <a:spAutoFit/>
           </a:bodyPr>
           <a:lstStyle/>
@@ -5899,7 +5910,7 @@
           <a:noFill/>
         </p:spPr>
         <p:txBody>
-          <a:bodyPr wrap="none" rtlCol="0">
+          <a:bodyPr wrap="square" rtlCol="0">
             <a:spAutoFit/>
           </a:bodyPr>
           <a:lstStyle/>
@@ -5926,7 +5937,7 @@
         <p:spPr>
           <a:xfrm>
             <a:off x="5277230" y="2696902"/>
-            <a:ext cx="1107168" cy="1780674"/>
+            <a:ext cx="1011754" cy="1780674"/>
           </a:xfrm>
           <a:prstGeom prst="rect">
             <a:avLst/>
@@ -6024,8 +6035,8 @@
         </p:nvCxnSpPr>
         <p:spPr>
           <a:xfrm>
-            <a:off x="6384398" y="3587239"/>
-            <a:ext cx="308390" cy="2836"/>
+            <a:off x="6288984" y="3587239"/>
+            <a:ext cx="310870" cy="2782"/>
           </a:xfrm>
           <a:prstGeom prst="straightConnector1">
             <a:avLst/>
